--- a/RAPTor/references/0622-raptStory_ccOpus48.pptx
+++ b/RAPTor/references/0622-raptStory_ccOpus48.pptx
@@ -2066,7 +2066,7 @@
           <a:p>
             <a:fld id="{5BCAD085-E8A6-8845-BD4E-CB4CCA059FC4}" type="datetimeFigureOut">
               <a:rPr lang="en-US" smtClean="0"/>
-              <a:t>6/24/2026</a:t>
+              <a:t>7/21/2026</a:t>
             </a:fld>
             <a:endParaRPr lang="en-US"/>
           </a:p>
@@ -2234,7 +2234,7 @@
           <a:p>
             <a:fld id="{5BCAD085-E8A6-8845-BD4E-CB4CCA059FC4}" type="datetimeFigureOut">
               <a:rPr lang="en-US" smtClean="0"/>
-              <a:t>6/24/2026</a:t>
+              <a:t>7/21/2026</a:t>
             </a:fld>
             <a:endParaRPr lang="en-US"/>
           </a:p>
@@ -2412,7 +2412,7 @@
           <a:p>
             <a:fld id="{5BCAD085-E8A6-8845-BD4E-CB4CCA059FC4}" type="datetimeFigureOut">
               <a:rPr lang="en-US" smtClean="0"/>
-              <a:t>6/24/2026</a:t>
+              <a:t>7/21/2026</a:t>
             </a:fld>
             <a:endParaRPr lang="en-US"/>
           </a:p>
@@ -2580,7 +2580,7 @@
           <a:p>
             <a:fld id="{5BCAD085-E8A6-8845-BD4E-CB4CCA059FC4}" type="datetimeFigureOut">
               <a:rPr lang="en-US" smtClean="0"/>
-              <a:t>6/24/2026</a:t>
+              <a:t>7/21/2026</a:t>
             </a:fld>
             <a:endParaRPr lang="en-US"/>
           </a:p>
@@ -2825,7 +2825,7 @@
           <a:p>
             <a:fld id="{5BCAD085-E8A6-8845-BD4E-CB4CCA059FC4}" type="datetimeFigureOut">
               <a:rPr lang="en-US" smtClean="0"/>
-              <a:t>6/24/2026</a:t>
+              <a:t>7/21/2026</a:t>
             </a:fld>
             <a:endParaRPr lang="en-US"/>
           </a:p>
@@ -3110,7 +3110,7 @@
           <a:p>
             <a:fld id="{5BCAD085-E8A6-8845-BD4E-CB4CCA059FC4}" type="datetimeFigureOut">
               <a:rPr lang="en-US" smtClean="0"/>
-              <a:t>6/24/2026</a:t>
+              <a:t>7/21/2026</a:t>
             </a:fld>
             <a:endParaRPr lang="en-US"/>
           </a:p>
@@ -3529,7 +3529,7 @@
           <a:p>
             <a:fld id="{5BCAD085-E8A6-8845-BD4E-CB4CCA059FC4}" type="datetimeFigureOut">
               <a:rPr lang="en-US" smtClean="0"/>
-              <a:t>6/24/2026</a:t>
+              <a:t>7/21/2026</a:t>
             </a:fld>
             <a:endParaRPr lang="en-US"/>
           </a:p>
@@ -3646,7 +3646,7 @@
           <a:p>
             <a:fld id="{5BCAD085-E8A6-8845-BD4E-CB4CCA059FC4}" type="datetimeFigureOut">
               <a:rPr lang="en-US" smtClean="0"/>
-              <a:t>6/24/2026</a:t>
+              <a:t>7/21/2026</a:t>
             </a:fld>
             <a:endParaRPr lang="en-US"/>
           </a:p>
@@ -3741,7 +3741,7 @@
           <a:p>
             <a:fld id="{5BCAD085-E8A6-8845-BD4E-CB4CCA059FC4}" type="datetimeFigureOut">
               <a:rPr lang="en-US" smtClean="0"/>
-              <a:t>6/24/2026</a:t>
+              <a:t>7/21/2026</a:t>
             </a:fld>
             <a:endParaRPr lang="en-US"/>
           </a:p>
@@ -4016,7 +4016,7 @@
           <a:p>
             <a:fld id="{5BCAD085-E8A6-8845-BD4E-CB4CCA059FC4}" type="datetimeFigureOut">
               <a:rPr lang="en-US" smtClean="0"/>
-              <a:t>6/24/2026</a:t>
+              <a:t>7/21/2026</a:t>
             </a:fld>
             <a:endParaRPr lang="en-US"/>
           </a:p>
@@ -4268,7 +4268,7 @@
           <a:p>
             <a:fld id="{5BCAD085-E8A6-8845-BD4E-CB4CCA059FC4}" type="datetimeFigureOut">
               <a:rPr lang="en-US" smtClean="0"/>
-              <a:t>6/24/2026</a:t>
+              <a:t>7/21/2026</a:t>
             </a:fld>
             <a:endParaRPr lang="en-US"/>
           </a:p>
@@ -4479,7 +4479,7 @@
           <a:p>
             <a:fld id="{5BCAD085-E8A6-8845-BD4E-CB4CCA059FC4}" type="datetimeFigureOut">
               <a:rPr lang="en-US" smtClean="0"/>
-              <a:t>6/24/2026</a:t>
+              <a:t>7/21/2026</a:t>
             </a:fld>
             <a:endParaRPr lang="en-US"/>
           </a:p>
@@ -26614,6 +26614,131 @@
                 <a:latin typeface="Microsoft JhengHei"/>
               </a:rPr>
               <a:t>沒有單一事實來源——每份文件，都號稱自己才是對的。</a:t>
+            </a:r>
+          </a:p>
+        </p:txBody>
+      </p:sp>
+      <p:sp>
+        <p:nvSpPr>
+          <p:cNvPr id="8" name="矩形 7">
+            <a:extLst>
+              <a:ext uri="{FF2B5EF4-FFF2-40B4-BE49-F238E27FC236}">
+                <a16:creationId xmlns:a16="http://schemas.microsoft.com/office/drawing/2014/main" id="{872B7197-F077-1FF3-AE55-13C201EB43EE}"/>
+              </a:ext>
+            </a:extLst>
+          </p:cNvPr>
+          <p:cNvSpPr/>
+          <p:nvPr/>
+        </p:nvSpPr>
+        <p:spPr>
+          <a:xfrm>
+            <a:off x="282174" y="5157430"/>
+            <a:ext cx="11333103" cy="923330"/>
+          </a:xfrm>
+          <a:prstGeom prst="rect">
+            <a:avLst/>
+          </a:prstGeom>
+          <a:noFill/>
+        </p:spPr>
+        <p:txBody>
+          <a:bodyPr wrap="none" lIns="91440" tIns="45720" rIns="91440" bIns="45720">
+            <a:spAutoFit/>
+          </a:bodyPr>
+          <a:lstStyle/>
+          <a:p>
+            <a:pPr algn="ctr"/>
+            <a:r>
+              <a:rPr lang="en-US" altLang="zh-TW" sz="5400" b="1" cap="none" spc="0" dirty="0" err="1">
+                <a:ln w="12700">
+                  <a:solidFill>
+                    <a:schemeClr val="tx2">
+                      <a:lumMod val="75000"/>
+                    </a:schemeClr>
+                  </a:solidFill>
+                  <a:prstDash val="solid"/>
+                </a:ln>
+                <a:pattFill prst="dkUpDiag">
+                  <a:fgClr>
+                    <a:schemeClr val="tx2"/>
+                  </a:fgClr>
+                  <a:bgClr>
+                    <a:schemeClr val="tx2">
+                      <a:lumMod val="20000"/>
+                      <a:lumOff val="80000"/>
+                    </a:schemeClr>
+                  </a:bgClr>
+                </a:pattFill>
+                <a:effectLst>
+                  <a:outerShdw dist="38100" dir="2640000" algn="bl" rotWithShape="0">
+                    <a:schemeClr val="tx2">
+                      <a:lumMod val="75000"/>
+                    </a:schemeClr>
+                  </a:outerShdw>
+                </a:effectLst>
+              </a:rPr>
+              <a:t>SSoT</a:t>
+            </a:r>
+            <a:r>
+              <a:rPr lang="en-US" altLang="zh-TW" sz="5400" b="1" cap="none" spc="0" dirty="0">
+                <a:ln w="12700">
+                  <a:solidFill>
+                    <a:schemeClr val="tx2">
+                      <a:lumMod val="75000"/>
+                    </a:schemeClr>
+                  </a:solidFill>
+                  <a:prstDash val="solid"/>
+                </a:ln>
+                <a:pattFill prst="dkUpDiag">
+                  <a:fgClr>
+                    <a:schemeClr val="tx2"/>
+                  </a:fgClr>
+                  <a:bgClr>
+                    <a:schemeClr val="tx2">
+                      <a:lumMod val="20000"/>
+                      <a:lumOff val="80000"/>
+                    </a:schemeClr>
+                  </a:bgClr>
+                </a:pattFill>
+                <a:effectLst>
+                  <a:outerShdw dist="38100" dir="2640000" algn="bl" rotWithShape="0">
+                    <a:schemeClr val="tx2">
+                      <a:lumMod val="75000"/>
+                    </a:schemeClr>
+                  </a:outerShdw>
+                </a:effectLst>
+              </a:rPr>
+              <a:t> (Single Source of Truth) </a:t>
+            </a:r>
+            <a:r>
+              <a:rPr lang="zh-TW" altLang="en-US" sz="5400" b="1" cap="none" spc="0" dirty="0">
+                <a:ln w="12700">
+                  <a:solidFill>
+                    <a:schemeClr val="tx2">
+                      <a:lumMod val="75000"/>
+                    </a:schemeClr>
+                  </a:solidFill>
+                  <a:prstDash val="solid"/>
+                </a:ln>
+                <a:pattFill prst="dkUpDiag">
+                  <a:fgClr>
+                    <a:schemeClr val="tx2"/>
+                  </a:fgClr>
+                  <a:bgClr>
+                    <a:schemeClr val="tx2">
+                      <a:lumMod val="20000"/>
+                      <a:lumOff val="80000"/>
+                    </a:schemeClr>
+                  </a:bgClr>
+                </a:pattFill>
+                <a:effectLst>
+                  <a:outerShdw dist="38100" dir="2640000" algn="bl" rotWithShape="0">
+                    <a:schemeClr val="tx2">
+                      <a:lumMod val="75000"/>
+                    </a:schemeClr>
+                  </a:outerShdw>
+                </a:effectLst>
+              </a:rPr>
+              <a:t>在哪裡？</a:t>
             </a:r>
           </a:p>
         </p:txBody>

--- a/RAPTor/references/0622-raptStory_ccOpus48.pptx
+++ b/RAPTor/references/0622-raptStory_ccOpus48.pptx
@@ -5,7 +5,7 @@
     <p:sldMasterId id="2147483648" r:id="rId1"/>
   </p:sldMasterIdLst>
   <p:notesMasterIdLst>
-    <p:notesMasterId r:id="rId29"/>
+    <p:notesMasterId r:id="rId28"/>
   </p:notesMasterIdLst>
   <p:sldIdLst>
     <p:sldId id="256" r:id="rId2"/>
@@ -34,7 +34,6 @@
     <p:sldId id="279" r:id="rId25"/>
     <p:sldId id="280" r:id="rId26"/>
     <p:sldId id="281" r:id="rId27"/>
-    <p:sldId id="282" r:id="rId28"/>
   </p:sldIdLst>
   <p:sldSz cx="12192000" cy="6858000"/>
   <p:notesSz cx="6858000" cy="9144000"/>
@@ -1327,76 +1326,6 @@
 </p:notes>
 </file>
 
-<file path=ppt/notesSlides/notesSlide23.xml><?xml version="1.0" encoding="utf-8"?>
-<p:notes xmlns:a="http://schemas.openxmlformats.org/drawingml/2006/main" xmlns:r="http://schemas.openxmlformats.org/officeDocument/2006/relationships" xmlns:p="http://schemas.openxmlformats.org/presentationml/2006/main">
-  <p:cSld>
-    <p:spTree>
-      <p:nvGrpSpPr>
-        <p:cNvPr id="1" name=""/>
-        <p:cNvGrpSpPr/>
-        <p:nvPr/>
-      </p:nvGrpSpPr>
-      <p:grpSpPr>
-        <a:xfrm>
-          <a:off x="0" y="0"/>
-          <a:ext cx="0" cy="0"/>
-          <a:chOff x="0" y="0"/>
-          <a:chExt cx="0" cy="0"/>
-        </a:xfrm>
-      </p:grpSpPr>
-      <p:sp>
-        <p:nvSpPr>
-          <p:cNvPr id="2" name="Slide Image Placeholder 1"/>
-          <p:cNvSpPr>
-            <a:spLocks noGrp="1" noRot="1" noChangeAspect="1"/>
-          </p:cNvSpPr>
-          <p:nvPr>
-            <p:ph type="sldImg" idx="2"/>
-          </p:nvPr>
-        </p:nvSpPr>
-        <p:spPr/>
-      </p:sp>
-      <p:sp>
-        <p:nvSpPr>
-          <p:cNvPr id="3" name="Notes Placeholder 2"/>
-          <p:cNvSpPr>
-            <a:spLocks noGrp="1"/>
-          </p:cNvSpPr>
-          <p:nvPr>
-            <p:ph type="body" sz="quarter" idx="3"/>
-          </p:nvPr>
-        </p:nvSpPr>
-        <p:spPr/>
-        <p:txBody>
-          <a:bodyPr/>
-          <a:lstStyle/>
-          <a:p>
-            <a:r>
-              <a:t>被問引用規則時翻。對應節點⑤的 verify FAIL。</a:t>
-            </a:r>
-          </a:p>
-        </p:txBody>
-      </p:sp>
-      <p:sp>
-        <p:nvSpPr>
-          <p:cNvPr id="4" name="Slide Number Placeholder 3"/>
-          <p:cNvSpPr>
-            <a:spLocks noGrp="1"/>
-          </p:cNvSpPr>
-          <p:nvPr>
-            <p:ph type="sldNum" sz="quarter" idx="5"/>
-          </p:nvPr>
-        </p:nvSpPr>
-        <p:spPr/>
-      </p:sp>
-    </p:spTree>
-  </p:cSld>
-  <p:clrMapOvr>
-    <a:masterClrMapping/>
-  </p:clrMapOvr>
-</p:notes>
-</file>
-
 <file path=ppt/notesSlides/notesSlide3.xml><?xml version="1.0" encoding="utf-8"?>
 <p:notes xmlns:a="http://schemas.openxmlformats.org/drawingml/2006/main" xmlns:r="http://schemas.openxmlformats.org/officeDocument/2006/relationships" xmlns:p="http://schemas.openxmlformats.org/presentationml/2006/main">
   <p:cSld>
@@ -2066,7 +1995,7 @@
           <a:p>
             <a:fld id="{5BCAD085-E8A6-8845-BD4E-CB4CCA059FC4}" type="datetimeFigureOut">
               <a:rPr lang="en-US" smtClean="0"/>
-              <a:t>7/21/2026</a:t>
+              <a:t>7/22/2026</a:t>
             </a:fld>
             <a:endParaRPr lang="en-US"/>
           </a:p>
@@ -2234,7 +2163,7 @@
           <a:p>
             <a:fld id="{5BCAD085-E8A6-8845-BD4E-CB4CCA059FC4}" type="datetimeFigureOut">
               <a:rPr lang="en-US" smtClean="0"/>
-              <a:t>7/21/2026</a:t>
+              <a:t>7/22/2026</a:t>
             </a:fld>
             <a:endParaRPr lang="en-US"/>
           </a:p>
@@ -2412,7 +2341,7 @@
           <a:p>
             <a:fld id="{5BCAD085-E8A6-8845-BD4E-CB4CCA059FC4}" type="datetimeFigureOut">
               <a:rPr lang="en-US" smtClean="0"/>
-              <a:t>7/21/2026</a:t>
+              <a:t>7/22/2026</a:t>
             </a:fld>
             <a:endParaRPr lang="en-US"/>
           </a:p>
@@ -2580,7 +2509,7 @@
           <a:p>
             <a:fld id="{5BCAD085-E8A6-8845-BD4E-CB4CCA059FC4}" type="datetimeFigureOut">
               <a:rPr lang="en-US" smtClean="0"/>
-              <a:t>7/21/2026</a:t>
+              <a:t>7/22/2026</a:t>
             </a:fld>
             <a:endParaRPr lang="en-US"/>
           </a:p>
@@ -2825,7 +2754,7 @@
           <a:p>
             <a:fld id="{5BCAD085-E8A6-8845-BD4E-CB4CCA059FC4}" type="datetimeFigureOut">
               <a:rPr lang="en-US" smtClean="0"/>
-              <a:t>7/21/2026</a:t>
+              <a:t>7/22/2026</a:t>
             </a:fld>
             <a:endParaRPr lang="en-US"/>
           </a:p>
@@ -3110,7 +3039,7 @@
           <a:p>
             <a:fld id="{5BCAD085-E8A6-8845-BD4E-CB4CCA059FC4}" type="datetimeFigureOut">
               <a:rPr lang="en-US" smtClean="0"/>
-              <a:t>7/21/2026</a:t>
+              <a:t>7/22/2026</a:t>
             </a:fld>
             <a:endParaRPr lang="en-US"/>
           </a:p>
@@ -3529,7 +3458,7 @@
           <a:p>
             <a:fld id="{5BCAD085-E8A6-8845-BD4E-CB4CCA059FC4}" type="datetimeFigureOut">
               <a:rPr lang="en-US" smtClean="0"/>
-              <a:t>7/21/2026</a:t>
+              <a:t>7/22/2026</a:t>
             </a:fld>
             <a:endParaRPr lang="en-US"/>
           </a:p>
@@ -3646,7 +3575,7 @@
           <a:p>
             <a:fld id="{5BCAD085-E8A6-8845-BD4E-CB4CCA059FC4}" type="datetimeFigureOut">
               <a:rPr lang="en-US" smtClean="0"/>
-              <a:t>7/21/2026</a:t>
+              <a:t>7/22/2026</a:t>
             </a:fld>
             <a:endParaRPr lang="en-US"/>
           </a:p>
@@ -3741,7 +3670,7 @@
           <a:p>
             <a:fld id="{5BCAD085-E8A6-8845-BD4E-CB4CCA059FC4}" type="datetimeFigureOut">
               <a:rPr lang="en-US" smtClean="0"/>
-              <a:t>7/21/2026</a:t>
+              <a:t>7/22/2026</a:t>
             </a:fld>
             <a:endParaRPr lang="en-US"/>
           </a:p>
@@ -4016,7 +3945,7 @@
           <a:p>
             <a:fld id="{5BCAD085-E8A6-8845-BD4E-CB4CCA059FC4}" type="datetimeFigureOut">
               <a:rPr lang="en-US" smtClean="0"/>
-              <a:t>7/21/2026</a:t>
+              <a:t>7/22/2026</a:t>
             </a:fld>
             <a:endParaRPr lang="en-US"/>
           </a:p>
@@ -4268,7 +4197,7 @@
           <a:p>
             <a:fld id="{5BCAD085-E8A6-8845-BD4E-CB4CCA059FC4}" type="datetimeFigureOut">
               <a:rPr lang="en-US" smtClean="0"/>
-              <a:t>7/21/2026</a:t>
+              <a:t>7/22/2026</a:t>
             </a:fld>
             <a:endParaRPr lang="en-US"/>
           </a:p>
@@ -4479,7 +4408,7 @@
           <a:p>
             <a:fld id="{5BCAD085-E8A6-8845-BD4E-CB4CCA059FC4}" type="datetimeFigureOut">
               <a:rPr lang="en-US" smtClean="0"/>
-              <a:t>7/21/2026</a:t>
+              <a:t>7/22/2026</a:t>
             </a:fld>
             <a:endParaRPr lang="en-US"/>
           </a:p>
@@ -23539,7 +23468,7 @@
         <p:spPr>
           <a:xfrm>
             <a:off x="1097280" y="5349240"/>
-            <a:ext cx="9994392" cy="457200"/>
+            <a:ext cx="9994392" cy="602216"/>
           </a:xfrm>
           <a:prstGeom prst="rect">
             <a:avLst/>
@@ -23600,7 +23529,7 @@
               <a:t>chrisokchen</a:t>
             </a:r>
             <a:r>
-              <a:rPr sz="1800" b="1">
+              <a:rPr sz="1800" b="1" dirty="0">
                 <a:solidFill>
                   <a:srgbClr val="F2C984"/>
                 </a:solidFill>
@@ -23608,6 +23537,76 @@
               </a:rPr>
               <a:t>/rapt</a:t>
             </a:r>
+            <a:endParaRPr lang="en-US" sz="1800" b="1" dirty="0">
+              <a:solidFill>
+                <a:srgbClr val="F2C984"/>
+              </a:solidFill>
+              <a:latin typeface="Microsoft JhengHei"/>
+            </a:endParaRPr>
+          </a:p>
+          <a:p>
+            <a:pPr algn="ctr">
+              <a:lnSpc>
+                <a:spcPct val="108000"/>
+              </a:lnSpc>
+              <a:spcBef>
+                <a:spcPts val="0"/>
+              </a:spcBef>
+              <a:spcAft>
+                <a:spcPts val="200"/>
+              </a:spcAft>
+            </a:pPr>
+            <a:r>
+              <a:rPr lang="en-US" sz="1800" b="1" dirty="0">
+                <a:solidFill>
+                  <a:schemeClr val="bg2"/>
+                </a:solidFill>
+                <a:latin typeface="Microsoft JhengHei"/>
+              </a:rPr>
+              <a:t>And even more, ask for:     </a:t>
+            </a:r>
+            <a:r>
+              <a:rPr lang="en-US" sz="1800" b="1" dirty="0">
+                <a:solidFill>
+                  <a:srgbClr val="F2C984"/>
+                </a:solidFill>
+                <a:latin typeface="Microsoft JhengHei"/>
+              </a:rPr>
+              <a:t>github.com/</a:t>
+            </a:r>
+            <a:r>
+              <a:rPr lang="en-US" sz="1800" b="1" dirty="0" err="1">
+                <a:solidFill>
+                  <a:srgbClr val="F2C984"/>
+                </a:solidFill>
+                <a:latin typeface="Microsoft JhengHei"/>
+              </a:rPr>
+              <a:t>chrisokchen</a:t>
+            </a:r>
+            <a:r>
+              <a:rPr lang="en-US" sz="1800" b="1" dirty="0">
+                <a:solidFill>
+                  <a:srgbClr val="F2C984"/>
+                </a:solidFill>
+                <a:latin typeface="Microsoft JhengHei"/>
+              </a:rPr>
+              <a:t>/</a:t>
+            </a:r>
+            <a:r>
+              <a:rPr lang="en-US" sz="1800" b="1" dirty="0" err="1">
+                <a:solidFill>
+                  <a:srgbClr val="F2C984"/>
+                </a:solidFill>
+                <a:latin typeface="Microsoft JhengHei"/>
+              </a:rPr>
+              <a:t>hyrapt</a:t>
+            </a:r>
+            <a:endParaRPr sz="1800" b="1" dirty="0">
+              <a:solidFill>
+                <a:srgbClr val="F2C984"/>
+              </a:solidFill>
+              <a:latin typeface="Microsoft JhengHei"/>
+            </a:endParaRPr>
           </a:p>
         </p:txBody>
       </p:sp>
@@ -25630,641 +25629,6 @@
 </p:sld>
 </file>
 
-<file path=ppt/slides/slide27.xml><?xml version="1.0" encoding="utf-8"?>
-<p:sld xmlns:a="http://schemas.openxmlformats.org/drawingml/2006/main" xmlns:r="http://schemas.openxmlformats.org/officeDocument/2006/relationships" xmlns:p="http://schemas.openxmlformats.org/presentationml/2006/main">
-  <p:cSld>
-    <p:spTree>
-      <p:nvGrpSpPr>
-        <p:cNvPr id="1" name=""/>
-        <p:cNvGrpSpPr/>
-        <p:nvPr/>
-      </p:nvGrpSpPr>
-      <p:grpSpPr>
-        <a:xfrm>
-          <a:off x="0" y="0"/>
-          <a:ext cx="0" cy="0"/>
-          <a:chOff x="0" y="0"/>
-          <a:chExt cx="0" cy="0"/>
-        </a:xfrm>
-      </p:grpSpPr>
-      <p:sp>
-        <p:nvSpPr>
-          <p:cNvPr id="2" name="Rectangle 1"/>
-          <p:cNvSpPr/>
-          <p:nvPr/>
-        </p:nvSpPr>
-        <p:spPr>
-          <a:xfrm>
-            <a:off x="0" y="0"/>
-            <a:ext cx="12191695" cy="6858000"/>
-          </a:xfrm>
-          <a:prstGeom prst="rect">
-            <a:avLst/>
-          </a:prstGeom>
-          <a:solidFill>
-            <a:srgbClr val="FFFFFF"/>
-          </a:solidFill>
-          <a:ln>
-            <a:noFill/>
-          </a:ln>
-          <a:effectLst/>
-        </p:spPr>
-        <p:style>
-          <a:lnRef idx="1">
-            <a:schemeClr val="accent1"/>
-          </a:lnRef>
-          <a:fillRef idx="3">
-            <a:schemeClr val="accent1"/>
-          </a:fillRef>
-          <a:effectRef idx="2">
-            <a:schemeClr val="accent1"/>
-          </a:effectRef>
-          <a:fontRef idx="minor">
-            <a:schemeClr val="lt1"/>
-          </a:fontRef>
-        </p:style>
-        <p:txBody>
-          <a:bodyPr rtlCol="0" anchor="ctr"/>
-          <a:lstStyle/>
-          <a:p>
-            <a:pPr algn="ctr"/>
-            <a:endParaRPr/>
-          </a:p>
-        </p:txBody>
-      </p:sp>
-      <p:sp>
-        <p:nvSpPr>
-          <p:cNvPr id="3" name="Rectangle 2"/>
-          <p:cNvSpPr/>
-          <p:nvPr/>
-        </p:nvSpPr>
-        <p:spPr>
-          <a:xfrm>
-            <a:off x="548640" y="512064"/>
-            <a:ext cx="91440" cy="475488"/>
-          </a:xfrm>
-          <a:prstGeom prst="rect">
-            <a:avLst/>
-          </a:prstGeom>
-          <a:solidFill>
-            <a:srgbClr val="E8A33D"/>
-          </a:solidFill>
-          <a:ln>
-            <a:noFill/>
-          </a:ln>
-          <a:effectLst/>
-        </p:spPr>
-        <p:style>
-          <a:lnRef idx="1">
-            <a:schemeClr val="accent1"/>
-          </a:lnRef>
-          <a:fillRef idx="3">
-            <a:schemeClr val="accent1"/>
-          </a:fillRef>
-          <a:effectRef idx="2">
-            <a:schemeClr val="accent1"/>
-          </a:effectRef>
-          <a:fontRef idx="minor">
-            <a:schemeClr val="lt1"/>
-          </a:fontRef>
-        </p:style>
-        <p:txBody>
-          <a:bodyPr rtlCol="0" anchor="ctr"/>
-          <a:lstStyle/>
-          <a:p>
-            <a:pPr algn="ctr"/>
-            <a:endParaRPr/>
-          </a:p>
-        </p:txBody>
-      </p:sp>
-      <p:sp>
-        <p:nvSpPr>
-          <p:cNvPr id="4" name="TextBox 3"/>
-          <p:cNvSpPr txBox="1"/>
-          <p:nvPr/>
-        </p:nvSpPr>
-        <p:spPr>
-          <a:xfrm>
-            <a:off x="804672" y="420624"/>
-            <a:ext cx="8869680" cy="822960"/>
-          </a:xfrm>
-          <a:prstGeom prst="rect">
-            <a:avLst/>
-          </a:prstGeom>
-          <a:noFill/>
-        </p:spPr>
-        <p:txBody>
-          <a:bodyPr wrap="square" lIns="0" tIns="0" rIns="0" bIns="0" anchor="ctr">
-            <a:spAutoFit/>
-          </a:bodyPr>
-          <a:lstStyle/>
-          <a:p>
-            <a:pPr algn="l">
-              <a:lnSpc>
-                <a:spcPct val="108000"/>
-              </a:lnSpc>
-              <a:spcBef>
-                <a:spcPts val="0"/>
-              </a:spcBef>
-              <a:spcAft>
-                <a:spcPts val="200"/>
-              </a:spcAft>
-            </a:pPr>
-            <a:r>
-              <a:rPr sz="2300" b="1">
-                <a:solidFill>
-                  <a:srgbClr val="1B2A41"/>
-                </a:solidFill>
-                <a:latin typeface="Microsoft JhengHei"/>
-              </a:rPr>
-              <a:t>跨 DSL 引用與一致性檢查</a:t>
-            </a:r>
-          </a:p>
-        </p:txBody>
-      </p:sp>
-      <p:sp>
-        <p:nvSpPr>
-          <p:cNvPr id="5" name="Rectangle 4"/>
-          <p:cNvSpPr/>
-          <p:nvPr/>
-        </p:nvSpPr>
-        <p:spPr>
-          <a:xfrm>
-            <a:off x="10104120" y="292608"/>
-            <a:ext cx="1536192" cy="329184"/>
-          </a:xfrm>
-          <a:prstGeom prst="rect">
-            <a:avLst/>
-          </a:prstGeom>
-          <a:solidFill>
-            <a:srgbClr val="F4F6F9"/>
-          </a:solidFill>
-          <a:ln>
-            <a:noFill/>
-          </a:ln>
-          <a:effectLst/>
-        </p:spPr>
-        <p:style>
-          <a:lnRef idx="1">
-            <a:schemeClr val="accent1"/>
-          </a:lnRef>
-          <a:fillRef idx="3">
-            <a:schemeClr val="accent1"/>
-          </a:fillRef>
-          <a:effectRef idx="2">
-            <a:schemeClr val="accent1"/>
-          </a:effectRef>
-          <a:fontRef idx="minor">
-            <a:schemeClr val="lt1"/>
-          </a:fontRef>
-        </p:style>
-        <p:txBody>
-          <a:bodyPr wrap="none" rtlCol="0" anchor="ctr"/>
-          <a:lstStyle/>
-          <a:p>
-            <a:pPr algn="ctr"/>
-            <a:r>
-              <a:rPr sz="1100" b="1">
-                <a:solidFill>
-                  <a:srgbClr val="1B2A41"/>
-                </a:solidFill>
-                <a:latin typeface="Microsoft JhengHei"/>
-              </a:rPr>
-              <a:t>Q&amp;A</a:t>
-            </a:r>
-          </a:p>
-        </p:txBody>
-      </p:sp>
-      <p:sp>
-        <p:nvSpPr>
-          <p:cNvPr id="6" name="Rectangle 5"/>
-          <p:cNvSpPr/>
-          <p:nvPr/>
-        </p:nvSpPr>
-        <p:spPr>
-          <a:xfrm>
-            <a:off x="548640" y="6464808"/>
-            <a:ext cx="11091672" cy="10972"/>
-          </a:xfrm>
-          <a:prstGeom prst="rect">
-            <a:avLst/>
-          </a:prstGeom>
-          <a:solidFill>
-            <a:srgbClr val="DCE2EA"/>
-          </a:solidFill>
-          <a:ln>
-            <a:noFill/>
-          </a:ln>
-          <a:effectLst/>
-        </p:spPr>
-        <p:style>
-          <a:lnRef idx="1">
-            <a:schemeClr val="accent1"/>
-          </a:lnRef>
-          <a:fillRef idx="3">
-            <a:schemeClr val="accent1"/>
-          </a:fillRef>
-          <a:effectRef idx="2">
-            <a:schemeClr val="accent1"/>
-          </a:effectRef>
-          <a:fontRef idx="minor">
-            <a:schemeClr val="lt1"/>
-          </a:fontRef>
-        </p:style>
-        <p:txBody>
-          <a:bodyPr rtlCol="0" anchor="ctr"/>
-          <a:lstStyle/>
-          <a:p>
-            <a:pPr algn="ctr"/>
-            <a:endParaRPr/>
-          </a:p>
-        </p:txBody>
-      </p:sp>
-      <p:sp>
-        <p:nvSpPr>
-          <p:cNvPr id="7" name="TextBox 6"/>
-          <p:cNvSpPr txBox="1"/>
-          <p:nvPr/>
-        </p:nvSpPr>
-        <p:spPr>
-          <a:xfrm>
-            <a:off x="10698480" y="6510528"/>
-            <a:ext cx="1325880" cy="274320"/>
-          </a:xfrm>
-          <a:prstGeom prst="rect">
-            <a:avLst/>
-          </a:prstGeom>
-          <a:noFill/>
-        </p:spPr>
-        <p:txBody>
-          <a:bodyPr wrap="square" lIns="0" tIns="0" rIns="0" bIns="0" anchor="t">
-            <a:spAutoFit/>
-          </a:bodyPr>
-          <a:lstStyle/>
-          <a:p>
-            <a:pPr algn="r">
-              <a:lnSpc>
-                <a:spcPct val="108000"/>
-              </a:lnSpc>
-              <a:spcBef>
-                <a:spcPts val="0"/>
-              </a:spcBef>
-              <a:spcAft>
-                <a:spcPts val="200"/>
-              </a:spcAft>
-            </a:pPr>
-            <a:r>
-              <a:rPr sz="950" b="0">
-                <a:solidFill>
-                  <a:srgbClr val="8A93A0"/>
-                </a:solidFill>
-                <a:latin typeface="Microsoft JhengHei"/>
-              </a:rPr>
-              <a:t>27 / 23</a:t>
-            </a:r>
-          </a:p>
-        </p:txBody>
-      </p:sp>
-      <p:sp>
-        <p:nvSpPr>
-          <p:cNvPr id="8" name="Rectangle 7"/>
-          <p:cNvSpPr/>
-          <p:nvPr/>
-        </p:nvSpPr>
-        <p:spPr>
-          <a:xfrm>
-            <a:off x="786384" y="1554480"/>
-            <a:ext cx="10607040" cy="2011680"/>
-          </a:xfrm>
-          <a:prstGeom prst="rect">
-            <a:avLst/>
-          </a:prstGeom>
-          <a:solidFill>
-            <a:srgbClr val="202733"/>
-          </a:solidFill>
-          <a:ln>
-            <a:noFill/>
-          </a:ln>
-          <a:effectLst/>
-        </p:spPr>
-        <p:style>
-          <a:lnRef idx="1">
-            <a:schemeClr val="accent1"/>
-          </a:lnRef>
-          <a:fillRef idx="3">
-            <a:schemeClr val="accent1"/>
-          </a:fillRef>
-          <a:effectRef idx="2">
-            <a:schemeClr val="accent1"/>
-          </a:effectRef>
-          <a:fontRef idx="minor">
-            <a:schemeClr val="lt1"/>
-          </a:fontRef>
-        </p:style>
-        <p:txBody>
-          <a:bodyPr rtlCol="0" anchor="ctr"/>
-          <a:lstStyle/>
-          <a:p>
-            <a:pPr algn="ctr"/>
-            <a:endParaRPr/>
-          </a:p>
-        </p:txBody>
-      </p:sp>
-      <p:sp>
-        <p:nvSpPr>
-          <p:cNvPr id="9" name="TextBox 8"/>
-          <p:cNvSpPr txBox="1"/>
-          <p:nvPr/>
-        </p:nvSpPr>
-        <p:spPr>
-          <a:xfrm>
-            <a:off x="1042416" y="1719072"/>
-            <a:ext cx="10149840" cy="1737360"/>
-          </a:xfrm>
-          <a:prstGeom prst="rect">
-            <a:avLst/>
-          </a:prstGeom>
-          <a:noFill/>
-        </p:spPr>
-        <p:txBody>
-          <a:bodyPr wrap="square" lIns="0" tIns="0" rIns="0" bIns="0" anchor="t">
-            <a:spAutoFit/>
-          </a:bodyPr>
-          <a:lstStyle/>
-          <a:p>
-            <a:pPr algn="l">
-              <a:lnSpc>
-                <a:spcPct val="118000"/>
-              </a:lnSpc>
-              <a:spcBef>
-                <a:spcPts val="0"/>
-              </a:spcBef>
-              <a:spcAft>
-                <a:spcPts val="0"/>
-              </a:spcAft>
-            </a:pPr>
-            <a:r>
-              <a:rPr sz="1200" b="0">
-                <a:solidFill>
-                  <a:srgbClr val="DDE4EE"/>
-                </a:solidFill>
-                <a:latin typeface="Consolas"/>
-              </a:rPr>
-              <a:t> DBML (資料SSoT) → haARM (權限SSoT) → haAPI (後端) → haPDL (前端)</a:t>
-            </a:r>
-          </a:p>
-          <a:p>
-            <a:pPr algn="l">
-              <a:lnSpc>
-                <a:spcPct val="118000"/>
-              </a:lnSpc>
-              <a:spcBef>
-                <a:spcPts val="0"/>
-              </a:spcBef>
-              <a:spcAft>
-                <a:spcPts val="0"/>
-              </a:spcAft>
-            </a:pPr>
-            <a:r>
-              <a:rPr sz="1200" b="0">
-                <a:solidFill>
-                  <a:srgbClr val="DDE4EE"/>
-                </a:solidFill>
-                <a:latin typeface="Consolas"/>
-              </a:rPr>
-              <a:t> 高階 Gherkin (行為) → 引用 haAPI 操作 / haPDL 動作（僅業務語意）</a:t>
-            </a:r>
-          </a:p>
-          <a:p>
-            <a:pPr algn="l">
-              <a:lnSpc>
-                <a:spcPct val="118000"/>
-              </a:lnSpc>
-              <a:spcBef>
-                <a:spcPts val="0"/>
-              </a:spcBef>
-              <a:spcAft>
-                <a:spcPts val="0"/>
-              </a:spcAft>
-            </a:pPr>
-            <a:endParaRPr sz="1200" b="0">
-              <a:solidFill>
-                <a:srgbClr val="DDE4EE"/>
-              </a:solidFill>
-              <a:latin typeface="Consolas"/>
-            </a:endParaRPr>
-          </a:p>
-          <a:p>
-            <a:pPr algn="l">
-              <a:lnSpc>
-                <a:spcPct val="118000"/>
-              </a:lnSpc>
-              <a:spcBef>
-                <a:spcPts val="0"/>
-              </a:spcBef>
-              <a:spcAft>
-                <a:spcPts val="0"/>
-              </a:spcAft>
-            </a:pPr>
-            <a:r>
-              <a:rPr sz="1200" b="0">
-                <a:solidFill>
-                  <a:srgbClr val="DDE4EE"/>
-                </a:solidFill>
-                <a:latin typeface="Consolas"/>
-              </a:rPr>
-              <a:t> 檢查例：haAPI entity: → DBML 表名（大小寫敏感）</a:t>
-            </a:r>
-          </a:p>
-          <a:p>
-            <a:pPr algn="l">
-              <a:lnSpc>
-                <a:spcPct val="118000"/>
-              </a:lnSpc>
-              <a:spcBef>
-                <a:spcPts val="0"/>
-              </a:spcBef>
-              <a:spcAft>
-                <a:spcPts val="0"/>
-              </a:spcAft>
-            </a:pPr>
-            <a:r>
-              <a:rPr sz="1200" b="0">
-                <a:solidFill>
-                  <a:srgbClr val="DDE4EE"/>
-                </a:solidFill>
-                <a:latin typeface="Consolas"/>
-              </a:rPr>
-              <a:t>        haPDL api: → haAPI id ／ auth.roles[] → haARM role</a:t>
-            </a:r>
-          </a:p>
-        </p:txBody>
-      </p:sp>
-      <p:sp>
-        <p:nvSpPr>
-          <p:cNvPr id="10" name="Rectangle 9"/>
-          <p:cNvSpPr/>
-          <p:nvPr/>
-        </p:nvSpPr>
-        <p:spPr>
-          <a:xfrm>
-            <a:off x="786384" y="3840480"/>
-            <a:ext cx="10607040" cy="914400"/>
-          </a:xfrm>
-          <a:prstGeom prst="rect">
-            <a:avLst/>
-          </a:prstGeom>
-          <a:solidFill>
-            <a:srgbClr val="FBF0DC"/>
-          </a:solidFill>
-          <a:ln>
-            <a:noFill/>
-          </a:ln>
-          <a:effectLst/>
-        </p:spPr>
-        <p:style>
-          <a:lnRef idx="1">
-            <a:schemeClr val="accent1"/>
-          </a:lnRef>
-          <a:fillRef idx="3">
-            <a:schemeClr val="accent1"/>
-          </a:fillRef>
-          <a:effectRef idx="2">
-            <a:schemeClr val="accent1"/>
-          </a:effectRef>
-          <a:fontRef idx="minor">
-            <a:schemeClr val="lt1"/>
-          </a:fontRef>
-        </p:style>
-        <p:txBody>
-          <a:bodyPr rtlCol="0" anchor="ctr"/>
-          <a:lstStyle/>
-          <a:p>
-            <a:pPr algn="ctr"/>
-            <a:endParaRPr/>
-          </a:p>
-        </p:txBody>
-      </p:sp>
-      <p:sp>
-        <p:nvSpPr>
-          <p:cNvPr id="11" name="Rectangle 10"/>
-          <p:cNvSpPr/>
-          <p:nvPr/>
-        </p:nvSpPr>
-        <p:spPr>
-          <a:xfrm>
-            <a:off x="786384" y="3840480"/>
-            <a:ext cx="82296" cy="914400"/>
-          </a:xfrm>
-          <a:prstGeom prst="rect">
-            <a:avLst/>
-          </a:prstGeom>
-          <a:solidFill>
-            <a:srgbClr val="E8A33D"/>
-          </a:solidFill>
-          <a:ln>
-            <a:noFill/>
-          </a:ln>
-          <a:effectLst/>
-        </p:spPr>
-        <p:style>
-          <a:lnRef idx="1">
-            <a:schemeClr val="accent1"/>
-          </a:lnRef>
-          <a:fillRef idx="3">
-            <a:schemeClr val="accent1"/>
-          </a:fillRef>
-          <a:effectRef idx="2">
-            <a:schemeClr val="accent1"/>
-          </a:effectRef>
-          <a:fontRef idx="minor">
-            <a:schemeClr val="lt1"/>
-          </a:fontRef>
-        </p:style>
-        <p:txBody>
-          <a:bodyPr rtlCol="0" anchor="ctr"/>
-          <a:lstStyle/>
-          <a:p>
-            <a:pPr algn="ctr"/>
-            <a:endParaRPr/>
-          </a:p>
-        </p:txBody>
-      </p:sp>
-      <p:sp>
-        <p:nvSpPr>
-          <p:cNvPr id="12" name="TextBox 11"/>
-          <p:cNvSpPr txBox="1"/>
-          <p:nvPr/>
-        </p:nvSpPr>
-        <p:spPr>
-          <a:xfrm>
-            <a:off x="1078992" y="3840480"/>
-            <a:ext cx="10149840" cy="914400"/>
-          </a:xfrm>
-          <a:prstGeom prst="rect">
-            <a:avLst/>
-          </a:prstGeom>
-          <a:noFill/>
-        </p:spPr>
-        <p:txBody>
-          <a:bodyPr wrap="square" lIns="0" tIns="0" rIns="0" bIns="0" anchor="ctr">
-            <a:spAutoFit/>
-          </a:bodyPr>
-          <a:lstStyle/>
-          <a:p>
-            <a:pPr algn="l">
-              <a:lnSpc>
-                <a:spcPct val="114000"/>
-              </a:lnSpc>
-              <a:spcBef>
-                <a:spcPts val="0"/>
-              </a:spcBef>
-              <a:spcAft>
-                <a:spcPts val="300"/>
-              </a:spcAft>
-            </a:pPr>
-            <a:r>
-              <a:rPr sz="1450" b="1">
-                <a:solidFill>
-                  <a:srgbClr val="1B2A41"/>
-                </a:solidFill>
-                <a:latin typeface="Microsoft JhengHei"/>
-              </a:rPr>
-              <a:t>這些不是建議，是 rapt-verify 會抓 FAIL 的硬規則。</a:t>
-            </a:r>
-          </a:p>
-          <a:p>
-            <a:pPr algn="l">
-              <a:lnSpc>
-                <a:spcPct val="114000"/>
-              </a:lnSpc>
-              <a:spcBef>
-                <a:spcPts val="0"/>
-              </a:spcBef>
-              <a:spcAft>
-                <a:spcPts val="300"/>
-              </a:spcAft>
-            </a:pPr>
-            <a:r>
-              <a:rPr sz="1350" b="0">
-                <a:solidFill>
-                  <a:srgbClr val="262E3A"/>
-                </a:solidFill>
-                <a:latin typeface="Microsoft JhengHei"/>
-              </a:rPr>
-              <a:t>改一處牽動哪裡，由方向決定——也由它自動算出來。</a:t>
-            </a:r>
-          </a:p>
-        </p:txBody>
-      </p:sp>
-    </p:spTree>
-  </p:cSld>
-  <p:clrMapOvr>
-    <a:masterClrMapping/>
-  </p:clrMapOvr>
-</p:sld>
-</file>
-
 <file path=ppt/slides/slide3.xml><?xml version="1.0" encoding="utf-8"?>
 <p:sld xmlns:a="http://schemas.openxmlformats.org/drawingml/2006/main" xmlns:r="http://schemas.openxmlformats.org/officeDocument/2006/relationships" xmlns:p="http://schemas.openxmlformats.org/presentationml/2006/main">
   <p:cSld>
@@ -30630,7 +29994,7 @@
         </p:nvSpPr>
         <p:spPr>
           <a:xfrm>
-            <a:off x="0" y="0"/>
+            <a:off x="0" y="6137"/>
             <a:ext cx="12191695" cy="6858000"/>
           </a:xfrm>
           <a:prstGeom prst="rect">
@@ -30791,14 +30155,29 @@
               </a:spcAft>
             </a:pPr>
             <a:r>
-              <a:rPr sz="1500" b="1">
+              <a:rPr sz="1500" b="1" dirty="0">
                 <a:solidFill>
                   <a:srgbClr val="F2C984"/>
                 </a:solidFill>
                 <a:latin typeface="Microsoft JhengHei"/>
               </a:rPr>
-              <a:t>Act 2 ｜ 邊演邊證</a:t>
-            </a:r>
+              <a:t>Act 2 ｜ </a:t>
+            </a:r>
+            <a:r>
+              <a:rPr sz="1500" b="1" dirty="0" err="1">
+                <a:solidFill>
+                  <a:srgbClr val="F2C984"/>
+                </a:solidFill>
+                <a:latin typeface="Microsoft JhengHei"/>
+              </a:rPr>
+              <a:t>邊演邊證</a:t>
+            </a:r>
+            <a:endParaRPr sz="1500" b="1" dirty="0">
+              <a:solidFill>
+                <a:srgbClr val="F2C984"/>
+              </a:solidFill>
+              <a:latin typeface="Microsoft JhengHei"/>
+            </a:endParaRPr>
           </a:p>
         </p:txBody>
       </p:sp>
@@ -30933,6 +30312,74 @@
                 <a:latin typeface="Microsoft JhengHei"/>
               </a:rPr>
               <a:t>9 / 23</a:t>
+            </a:r>
+          </a:p>
+        </p:txBody>
+      </p:sp>
+      <p:sp>
+        <p:nvSpPr>
+          <p:cNvPr id="9" name="文字方塊 8">
+            <a:extLst>
+              <a:ext uri="{FF2B5EF4-FFF2-40B4-BE49-F238E27FC236}">
+                <a16:creationId xmlns:a16="http://schemas.microsoft.com/office/drawing/2014/main" id="{7D631D6C-4FBC-E598-4597-CE736398E325}"/>
+              </a:ext>
+            </a:extLst>
+          </p:cNvPr>
+          <p:cNvSpPr txBox="1"/>
+          <p:nvPr/>
+        </p:nvSpPr>
+        <p:spPr>
+          <a:xfrm>
+            <a:off x="1423966" y="5365063"/>
+            <a:ext cx="9107179" cy="1200329"/>
+          </a:xfrm>
+          <a:prstGeom prst="rect">
+            <a:avLst/>
+          </a:prstGeom>
+          <a:solidFill>
+            <a:schemeClr val="bg1"/>
+          </a:solidFill>
+        </p:spPr>
+        <p:txBody>
+          <a:bodyPr wrap="square" rtlCol="0">
+            <a:spAutoFit/>
+          </a:bodyPr>
+          <a:lstStyle/>
+          <a:p>
+            <a:r>
+              <a:rPr lang="en-US" altLang="zh-TW" dirty="0"/>
+              <a:t>cd </a:t>
+            </a:r>
+            <a:r>
+              <a:rPr lang="zh-TW" altLang="en-US" dirty="0"/>
+              <a:t>到 </a:t>
+            </a:r>
+            <a:r>
+              <a:rPr lang="en-US" altLang="zh-TW" dirty="0"/>
+              <a:t>Projects\</a:t>
+            </a:r>
+            <a:r>
+              <a:rPr lang="en-US" altLang="zh-TW" dirty="0" err="1"/>
+              <a:t>smallBiz</a:t>
+            </a:r>
+            <a:endParaRPr lang="en-US" altLang="zh-TW" dirty="0"/>
+          </a:p>
+          <a:p>
+            <a:r>
+              <a:rPr lang="zh-TW" altLang="zh-TW" dirty="0"/>
+              <a:t>mkdir .agents</a:t>
+            </a:r>
+          </a:p>
+          <a:p>
+            <a:r>
+              <a:rPr lang="zh-TW" altLang="zh-TW" dirty="0"/>
+              <a:t>cmd /c mklink /J .agents\skills ..\..\RAPTor\.agents\skills</a:t>
+            </a:r>
+          </a:p>
+          <a:p>
+            <a:r>
+              <a:rPr lang="zh-TW" altLang="zh-TW" dirty="0"/>
+              <a:t>cmd /c mklink /J DSLspec ..\..\RAPTor\DSLspec</a:t>
             </a:r>
           </a:p>
         </p:txBody>
